--- a/2026/LEC/01-2 Модели ВР и постановка задачи.pptx
+++ b/2026/LEC/01-2 Модели ВР и постановка задачи.pptx
@@ -223,7 +223,7 @@
           <a:p>
             <a:fld id="{CDA96C9A-3213-B245-BC64-7E419D14BD9D}" type="datetimeFigureOut">
               <a:rPr lang="ru-RU" smtClean="0"/>
-              <a:t>20.08.2025</a:t>
+              <a:t>12.02.2026</a:t>
             </a:fld>
             <a:endParaRPr lang="ru-RU"/>
           </a:p>
@@ -957,7 +957,7 @@
           <a:p>
             <a:fld id="{BEE214BE-636D-8A45-BCA6-8B7ED77AA124}" type="datetime1">
               <a:rPr lang="ru-RU" smtClean="0"/>
-              <a:t>20.08.2025</a:t>
+              <a:t>12.02.2026</a:t>
             </a:fld>
             <a:endParaRPr lang="en-US"/>
           </a:p>
@@ -1127,7 +1127,7 @@
           <a:p>
             <a:fld id="{5855274A-4ED4-0146-A3E9-88EF200B5196}" type="datetime1">
               <a:rPr lang="ru-RU" smtClean="0"/>
-              <a:t>20.08.2025</a:t>
+              <a:t>12.02.2026</a:t>
             </a:fld>
             <a:endParaRPr lang="en-US"/>
           </a:p>
@@ -1307,7 +1307,7 @@
           <a:p>
             <a:fld id="{8A78DFF1-9FDC-144B-973E-B4B4609709DF}" type="datetime1">
               <a:rPr lang="ru-RU" smtClean="0"/>
-              <a:t>20.08.2025</a:t>
+              <a:t>12.02.2026</a:t>
             </a:fld>
             <a:endParaRPr lang="en-US"/>
           </a:p>
@@ -1477,7 +1477,7 @@
           <a:p>
             <a:fld id="{8233A339-F8AE-5C45-BEAE-07EF9DC78B60}" type="datetime1">
               <a:rPr lang="ru-RU" smtClean="0"/>
-              <a:t>20.08.2025</a:t>
+              <a:t>12.02.2026</a:t>
             </a:fld>
             <a:endParaRPr lang="en-US"/>
           </a:p>
@@ -1723,7 +1723,7 @@
           <a:p>
             <a:fld id="{7586FDE4-97E0-CE4A-988C-F30B221290A7}" type="datetime1">
               <a:rPr lang="ru-RU" smtClean="0"/>
-              <a:t>20.08.2025</a:t>
+              <a:t>12.02.2026</a:t>
             </a:fld>
             <a:endParaRPr lang="en-US"/>
           </a:p>
@@ -1955,7 +1955,7 @@
           <a:p>
             <a:fld id="{C36ECE8B-8DEC-154E-9F03-047C8DDA20DC}" type="datetime1">
               <a:rPr lang="ru-RU" smtClean="0"/>
-              <a:t>20.08.2025</a:t>
+              <a:t>12.02.2026</a:t>
             </a:fld>
             <a:endParaRPr lang="en-US"/>
           </a:p>
@@ -2322,7 +2322,7 @@
           <a:p>
             <a:fld id="{440816D5-BDB8-B34B-8ACA-ECBDD12E7321}" type="datetime1">
               <a:rPr lang="ru-RU" smtClean="0"/>
-              <a:t>20.08.2025</a:t>
+              <a:t>12.02.2026</a:t>
             </a:fld>
             <a:endParaRPr lang="en-US"/>
           </a:p>
@@ -2440,7 +2440,7 @@
           <a:p>
             <a:fld id="{8A8C589A-5627-764C-AF96-C1E2F9A00A4D}" type="datetime1">
               <a:rPr lang="ru-RU" smtClean="0"/>
-              <a:t>20.08.2025</a:t>
+              <a:t>12.02.2026</a:t>
             </a:fld>
             <a:endParaRPr lang="en-US"/>
           </a:p>
@@ -2535,7 +2535,7 @@
           <a:p>
             <a:fld id="{603EE0D0-1696-6D4F-B917-4AFB24A74E8B}" type="datetime1">
               <a:rPr lang="ru-RU" smtClean="0"/>
-              <a:t>20.08.2025</a:t>
+              <a:t>12.02.2026</a:t>
             </a:fld>
             <a:endParaRPr lang="en-US"/>
           </a:p>
@@ -2812,7 +2812,7 @@
           <a:p>
             <a:fld id="{13C8A91E-B09B-2240-9AA3-B1D4BCC6296E}" type="datetime1">
               <a:rPr lang="ru-RU" smtClean="0"/>
-              <a:t>20.08.2025</a:t>
+              <a:t>12.02.2026</a:t>
             </a:fld>
             <a:endParaRPr lang="en-US"/>
           </a:p>
@@ -3069,7 +3069,7 @@
           <a:p>
             <a:fld id="{3BE9760E-DA8D-6747-B31E-62858C8727B8}" type="datetime1">
               <a:rPr lang="ru-RU" smtClean="0"/>
-              <a:t>20.08.2025</a:t>
+              <a:t>12.02.2026</a:t>
             </a:fld>
             <a:endParaRPr lang="en-US"/>
           </a:p>
@@ -3282,7 +3282,7 @@
           <a:p>
             <a:fld id="{D31305DF-F750-CC43-967D-51A20925EE94}" type="datetime1">
               <a:rPr lang="ru-RU" smtClean="0"/>
-              <a:t>20.08.2025</a:t>
+              <a:t>12.02.2026</a:t>
             </a:fld>
             <a:endParaRPr lang="en-US"/>
           </a:p>
@@ -4592,6 +4592,13 @@
   <p:clrMapOvr>
     <a:masterClrMapping/>
   </p:clrMapOvr>
+  <p:timing>
+    <p:tnLst>
+      <p:par>
+        <p:cTn id="1" dur="indefinite" restart="never" nodeType="tmRoot"/>
+      </p:par>
+    </p:tnLst>
+  </p:timing>
 </p:sld>
 </file>
 
@@ -5107,6 +5114,13 @@
   <p:clrMapOvr>
     <a:masterClrMapping/>
   </p:clrMapOvr>
+  <p:timing>
+    <p:tnLst>
+      <p:par>
+        <p:cTn id="1" dur="indefinite" restart="never" nodeType="tmRoot"/>
+      </p:par>
+    </p:tnLst>
+  </p:timing>
 </p:sld>
 </file>
 
@@ -5519,6 +5533,13 @@
   <p:clrMapOvr>
     <a:masterClrMapping/>
   </p:clrMapOvr>
+  <p:timing>
+    <p:tnLst>
+      <p:par>
+        <p:cTn id="1" dur="indefinite" restart="never" nodeType="tmRoot"/>
+      </p:par>
+    </p:tnLst>
+  </p:timing>
 </p:sld>
 </file>
 
@@ -6719,6 +6740,13 @@
   <p:clrMapOvr>
     <a:masterClrMapping/>
   </p:clrMapOvr>
+  <p:timing>
+    <p:tnLst>
+      <p:par>
+        <p:cTn id="1" dur="indefinite" restart="never" nodeType="tmRoot"/>
+      </p:par>
+    </p:tnLst>
+  </p:timing>
 </p:sld>
 </file>
 
@@ -7030,6 +7058,13 @@
   <p:clrMapOvr>
     <a:masterClrMapping/>
   </p:clrMapOvr>
+  <p:timing>
+    <p:tnLst>
+      <p:par>
+        <p:cTn id="1" dur="indefinite" restart="never" nodeType="tmRoot"/>
+      </p:par>
+    </p:tnLst>
+  </p:timing>
 </p:sld>
 </file>
 
@@ -7129,6 +7164,13 @@
   <p:clrMapOvr>
     <a:masterClrMapping/>
   </p:clrMapOvr>
+  <p:timing>
+    <p:tnLst>
+      <p:par>
+        <p:cTn id="1" dur="indefinite" restart="never" nodeType="tmRoot"/>
+      </p:par>
+    </p:tnLst>
+  </p:timing>
 </p:sld>
 </file>
 
@@ -7478,6 +7520,13 @@
   <p:clrMapOvr>
     <a:masterClrMapping/>
   </p:clrMapOvr>
+  <p:timing>
+    <p:tnLst>
+      <p:par>
+        <p:cTn id="1" dur="indefinite" restart="never" nodeType="tmRoot"/>
+      </p:par>
+    </p:tnLst>
+  </p:timing>
 </p:sld>
 </file>
 
@@ -7719,8 +7768,8 @@
           </a:ln>
         </p:spPr>
       </p:pic>
-      <mc:AlternateContent xmlns:mc="http://schemas.openxmlformats.org/markup-compatibility/2006">
-        <mc:Choice xmlns:a14="http://schemas.microsoft.com/office/drawing/2010/main" Requires="a14">
+      <mc:AlternateContent xmlns:mc="http://schemas.openxmlformats.org/markup-compatibility/2006" xmlns:a14="http://schemas.microsoft.com/office/drawing/2010/main">
+        <mc:Choice Requires="a14">
           <p:sp>
             <p:nvSpPr>
               <p:cNvPr id="6" name="Прямоугольник 5"/>
@@ -7947,7 +7996,7 @@
             </p:txBody>
           </p:sp>
         </mc:Choice>
-        <mc:Fallback>
+        <mc:Fallback xmlns="">
           <p:sp>
             <p:nvSpPr>
               <p:cNvPr id="6" name="Прямоугольник 5"/>
@@ -8086,6 +8135,13 @@
   <p:clrMapOvr>
     <a:masterClrMapping/>
   </p:clrMapOvr>
+  <p:timing>
+    <p:tnLst>
+      <p:par>
+        <p:cTn id="1" dur="indefinite" restart="never" nodeType="tmRoot"/>
+      </p:par>
+    </p:tnLst>
+  </p:timing>
 </p:sld>
 </file>
 
@@ -9535,6 +9591,13 @@
   <p:clrMapOvr>
     <a:masterClrMapping/>
   </p:clrMapOvr>
+  <p:timing>
+    <p:tnLst>
+      <p:par>
+        <p:cTn id="1" dur="indefinite" restart="never" nodeType="tmRoot"/>
+      </p:par>
+    </p:tnLst>
+  </p:timing>
 </p:sld>
 </file>
 
@@ -9794,6 +9857,13 @@
   <p:clrMapOvr>
     <a:masterClrMapping/>
   </p:clrMapOvr>
+  <p:timing>
+    <p:tnLst>
+      <p:par>
+        <p:cTn id="1" dur="indefinite" restart="never" nodeType="tmRoot"/>
+      </p:par>
+    </p:tnLst>
+  </p:timing>
 </p:sld>
 </file>
 
@@ -10519,6 +10589,13 @@
   <p:clrMapOvr>
     <a:masterClrMapping/>
   </p:clrMapOvr>
+  <p:timing>
+    <p:tnLst>
+      <p:par>
+        <p:cTn id="1" dur="indefinite" restart="never" nodeType="tmRoot"/>
+      </p:par>
+    </p:tnLst>
+  </p:timing>
 </p:sld>
 </file>
 
@@ -10727,11 +10804,7 @@
             </a:r>
             <a:r>
               <a:rPr lang="ru-RU" sz="2400" b="1" dirty="0"/>
-              <a:t>для предсказания  </a:t>
-            </a:r>
-            <a:r>
-              <a:rPr lang="ru-RU" sz="2400" b="1" dirty="0"/>
-              <a:t>(Диагностика </a:t>
+              <a:t>для предсказания  (Диагностика </a:t>
             </a:r>
             <a:r>
               <a:rPr lang="ru-RU" sz="2400" b="1" dirty="0" smtClean="0"/>
@@ -10741,7 +10814,6 @@
               <a:rPr lang="ru-RU" sz="2400" b="1" dirty="0"/>
               <a:t>)</a:t>
             </a:r>
-            <a:endParaRPr lang="ru-RU" sz="2400" b="1" dirty="0"/>
           </a:p>
           <a:p>
             <a:pPr lvl="1"/>
@@ -11027,6 +11099,13 @@
   <p:clrMapOvr>
     <a:masterClrMapping/>
   </p:clrMapOvr>
+  <p:timing>
+    <p:tnLst>
+      <p:par>
+        <p:cTn id="1" dur="indefinite" restart="never" nodeType="tmRoot"/>
+      </p:par>
+    </p:tnLst>
+  </p:timing>
 </p:sld>
 </file>
 
@@ -11349,11 +11428,7 @@
             <a:pPr lvl="0"/>
             <a:r>
               <a:rPr lang="ru-RU" sz="2400" dirty="0"/>
-              <a:t> </a:t>
-            </a:r>
-            <a:r>
-              <a:rPr lang="ru-RU" sz="2400" dirty="0"/>
-              <a:t>Объясните необходимость задач вероятностного прогнозирования ВР. Приведите примеры задач где это важно. </a:t>
+              <a:t> Объясните необходимость задач вероятностного прогнозирования ВР. Приведите примеры задач где это важно. </a:t>
             </a:r>
           </a:p>
           <a:p>
@@ -11418,6 +11493,13 @@
   <p:clrMapOvr>
     <a:masterClrMapping/>
   </p:clrMapOvr>
+  <p:timing>
+    <p:tnLst>
+      <p:par>
+        <p:cTn id="1" dur="indefinite" restart="never" nodeType="tmRoot"/>
+      </p:par>
+    </p:tnLst>
+  </p:timing>
 </p:sld>
 </file>
 
@@ -11848,6 +11930,13 @@
       <p:transition spd="slow"/>
     </mc:Fallback>
   </mc:AlternateContent>
+  <p:timing>
+    <p:tnLst>
+      <p:par>
+        <p:cTn id="1" dur="indefinite" restart="never" nodeType="tmRoot"/>
+      </p:par>
+    </p:tnLst>
+  </p:timing>
 </p:sld>
 </file>
 
@@ -13444,6 +13533,13 @@
   <p:clrMapOvr>
     <a:masterClrMapping/>
   </p:clrMapOvr>
+  <p:timing>
+    <p:tnLst>
+      <p:par>
+        <p:cTn id="1" dur="indefinite" restart="never" nodeType="tmRoot"/>
+      </p:par>
+    </p:tnLst>
+  </p:timing>
 </p:sld>
 </file>
 
@@ -14153,6 +14249,13 @@
   <p:clrMapOvr>
     <a:masterClrMapping/>
   </p:clrMapOvr>
+  <p:timing>
+    <p:tnLst>
+      <p:par>
+        <p:cTn id="1" dur="indefinite" restart="never" nodeType="tmRoot"/>
+      </p:par>
+    </p:tnLst>
+  </p:timing>
 </p:sld>
 </file>
 
@@ -14677,6 +14780,13 @@
   <p:clrMapOvr>
     <a:masterClrMapping/>
   </p:clrMapOvr>
+  <p:timing>
+    <p:tnLst>
+      <p:par>
+        <p:cTn id="1" dur="indefinite" restart="never" nodeType="tmRoot"/>
+      </p:par>
+    </p:tnLst>
+  </p:timing>
 </p:sld>
 </file>
 
@@ -16091,6 +16201,13 @@
   <p:clrMapOvr>
     <a:masterClrMapping/>
   </p:clrMapOvr>
+  <p:timing>
+    <p:tnLst>
+      <p:par>
+        <p:cTn id="1" dur="indefinite" restart="never" nodeType="tmRoot"/>
+      </p:par>
+    </p:tnLst>
+  </p:timing>
 </p:sld>
 </file>
 
@@ -16892,6 +17009,13 @@
   <p:clrMapOvr>
     <a:masterClrMapping/>
   </p:clrMapOvr>
+  <p:timing>
+    <p:tnLst>
+      <p:par>
+        <p:cTn id="1" dur="indefinite" restart="never" nodeType="tmRoot"/>
+      </p:par>
+    </p:tnLst>
+  </p:timing>
 </p:sld>
 </file>
 
@@ -17712,6 +17836,13 @@
   <p:clrMapOvr>
     <a:masterClrMapping/>
   </p:clrMapOvr>
+  <p:timing>
+    <p:tnLst>
+      <p:par>
+        <p:cTn id="1" dur="indefinite" restart="never" nodeType="tmRoot"/>
+      </p:par>
+    </p:tnLst>
+  </p:timing>
 </p:sld>
 </file>
 
@@ -18729,6 +18860,13 @@
   <p:clrMapOvr>
     <a:masterClrMapping/>
   </p:clrMapOvr>
+  <p:timing>
+    <p:tnLst>
+      <p:par>
+        <p:cTn id="1" dur="indefinite" restart="never" nodeType="tmRoot"/>
+      </p:par>
+    </p:tnLst>
+  </p:timing>
 </p:sld>
 </file>
 
